--- a/powerpoint/Local_Bike_ppt_v3.pptx
+++ b/powerpoint/Local_Bike_ppt_v3.pptx
@@ -2466,10 +2466,10 @@
       </p:sp>
       <p:pic>
         <p:nvPicPr>
-          <p:cNvPr id="4" name="Image 3">
+          <p:cNvPr id="5" name="Image 4">
             <a:extLst>
               <a:ext uri="{FF2B5EF4-FFF2-40B4-BE49-F238E27FC236}">
-                <a16:creationId xmlns:a16="http://schemas.microsoft.com/office/drawing/2014/main" id="{D01BE5DF-C746-EAC4-E48E-3FCF16BC4A26}"/>
+                <a16:creationId xmlns:a16="http://schemas.microsoft.com/office/drawing/2014/main" id="{83782D64-E32A-7C94-DDA4-319C31ED3947}"/>
               </a:ext>
             </a:extLst>
           </p:cNvPr>
@@ -2486,8 +2486,8 @@
         </p:blipFill>
         <p:spPr>
           <a:xfrm>
-            <a:off x="2204235" y="925431"/>
-            <a:ext cx="4735530" cy="4090180"/>
+            <a:off x="2216795" y="932688"/>
+            <a:ext cx="4710410" cy="4043843"/>
           </a:xfrm>
           <a:prstGeom prst="rect">
             <a:avLst/>
